--- a/LLM_Vulnerability_Detection_-_Presentation.pptx
+++ b/LLM_Vulnerability_Detection_-_Presentation.pptx
@@ -2665,7 +2665,7 @@
           <a:p>
             <a:fld id="{5BCAD085-E8A6-8845-BD4E-CB4CCA059FC4}" type="datetimeFigureOut">
               <a:rPr lang="en-US" smtClean="0"/>
-              <a:t>7/13/2026</a:t>
+              <a:t>8/4/2026</a:t>
             </a:fld>
             <a:endParaRPr lang="en-US"/>
           </a:p>
@@ -2833,7 +2833,7 @@
           <a:p>
             <a:fld id="{5BCAD085-E8A6-8845-BD4E-CB4CCA059FC4}" type="datetimeFigureOut">
               <a:rPr lang="en-US" smtClean="0"/>
-              <a:t>7/13/2026</a:t>
+              <a:t>8/4/2026</a:t>
             </a:fld>
             <a:endParaRPr lang="en-US"/>
           </a:p>
@@ -3011,7 +3011,7 @@
           <a:p>
             <a:fld id="{5BCAD085-E8A6-8845-BD4E-CB4CCA059FC4}" type="datetimeFigureOut">
               <a:rPr lang="en-US" smtClean="0"/>
-              <a:t>7/13/2026</a:t>
+              <a:t>8/4/2026</a:t>
             </a:fld>
             <a:endParaRPr lang="en-US"/>
           </a:p>
@@ -3179,7 +3179,7 @@
           <a:p>
             <a:fld id="{5BCAD085-E8A6-8845-BD4E-CB4CCA059FC4}" type="datetimeFigureOut">
               <a:rPr lang="en-US" smtClean="0"/>
-              <a:t>7/13/2026</a:t>
+              <a:t>8/4/2026</a:t>
             </a:fld>
             <a:endParaRPr lang="en-US"/>
           </a:p>
@@ -3424,7 +3424,7 @@
           <a:p>
             <a:fld id="{5BCAD085-E8A6-8845-BD4E-CB4CCA059FC4}" type="datetimeFigureOut">
               <a:rPr lang="en-US" smtClean="0"/>
-              <a:t>7/13/2026</a:t>
+              <a:t>8/4/2026</a:t>
             </a:fld>
             <a:endParaRPr lang="en-US"/>
           </a:p>
@@ -3709,7 +3709,7 @@
           <a:p>
             <a:fld id="{5BCAD085-E8A6-8845-BD4E-CB4CCA059FC4}" type="datetimeFigureOut">
               <a:rPr lang="en-US" smtClean="0"/>
-              <a:t>7/13/2026</a:t>
+              <a:t>8/4/2026</a:t>
             </a:fld>
             <a:endParaRPr lang="en-US"/>
           </a:p>
@@ -4128,7 +4128,7 @@
           <a:p>
             <a:fld id="{5BCAD085-E8A6-8845-BD4E-CB4CCA059FC4}" type="datetimeFigureOut">
               <a:rPr lang="en-US" smtClean="0"/>
-              <a:t>7/13/2026</a:t>
+              <a:t>8/4/2026</a:t>
             </a:fld>
             <a:endParaRPr lang="en-US"/>
           </a:p>
@@ -4245,7 +4245,7 @@
           <a:p>
             <a:fld id="{5BCAD085-E8A6-8845-BD4E-CB4CCA059FC4}" type="datetimeFigureOut">
               <a:rPr lang="en-US" smtClean="0"/>
-              <a:t>7/13/2026</a:t>
+              <a:t>8/4/2026</a:t>
             </a:fld>
             <a:endParaRPr lang="en-US"/>
           </a:p>
@@ -4340,7 +4340,7 @@
           <a:p>
             <a:fld id="{5BCAD085-E8A6-8845-BD4E-CB4CCA059FC4}" type="datetimeFigureOut">
               <a:rPr lang="en-US" smtClean="0"/>
-              <a:t>7/13/2026</a:t>
+              <a:t>8/4/2026</a:t>
             </a:fld>
             <a:endParaRPr lang="en-US"/>
           </a:p>
@@ -4615,7 +4615,7 @@
           <a:p>
             <a:fld id="{5BCAD085-E8A6-8845-BD4E-CB4CCA059FC4}" type="datetimeFigureOut">
               <a:rPr lang="en-US" smtClean="0"/>
-              <a:t>7/13/2026</a:t>
+              <a:t>8/4/2026</a:t>
             </a:fld>
             <a:endParaRPr lang="en-US"/>
           </a:p>
@@ -4867,7 +4867,7 @@
           <a:p>
             <a:fld id="{5BCAD085-E8A6-8845-BD4E-CB4CCA059FC4}" type="datetimeFigureOut">
               <a:rPr lang="en-US" smtClean="0"/>
-              <a:t>7/13/2026</a:t>
+              <a:t>8/4/2026</a:t>
             </a:fld>
             <a:endParaRPr lang="en-US"/>
           </a:p>
@@ -5078,7 +5078,7 @@
           <a:p>
             <a:fld id="{5BCAD085-E8A6-8845-BD4E-CB4CCA059FC4}" type="datetimeFigureOut">
               <a:rPr lang="en-US" smtClean="0"/>
-              <a:t>7/13/2026</a:t>
+              <a:t>8/4/2026</a:t>
             </a:fld>
             <a:endParaRPr lang="en-US"/>
           </a:p>
@@ -5506,53 +5506,8 @@
         </p:nvSpPr>
         <p:spPr>
           <a:xfrm>
-            <a:off x="9418320" y="-1463040"/>
+            <a:off x="126836" y="91440"/>
             <a:ext cx="4114800" cy="4114800"/>
-          </a:xfrm>
-          <a:prstGeom prst="ellipse">
-            <a:avLst/>
-          </a:prstGeom>
-          <a:solidFill>
-            <a:srgbClr val="1E2761"/>
-          </a:solidFill>
-          <a:ln>
-            <a:noFill/>
-          </a:ln>
-          <a:effectLst/>
-        </p:spPr>
-        <p:style>
-          <a:lnRef idx="1">
-            <a:schemeClr val="accent1"/>
-          </a:lnRef>
-          <a:fillRef idx="3">
-            <a:schemeClr val="accent1"/>
-          </a:fillRef>
-          <a:effectRef idx="2">
-            <a:schemeClr val="accent1"/>
-          </a:effectRef>
-          <a:fontRef idx="minor">
-            <a:schemeClr val="lt1"/>
-          </a:fontRef>
-        </p:style>
-        <p:txBody>
-          <a:bodyPr rtlCol="0" anchor="ctr"/>
-          <a:lstStyle/>
-          <a:p>
-            <a:pPr algn="ctr"/>
-            <a:endParaRPr/>
-          </a:p>
-        </p:txBody>
-      </p:sp>
-      <p:sp>
-        <p:nvSpPr>
-          <p:cNvPr id="4" name="Oval 3"/>
-          <p:cNvSpPr/>
-          <p:nvPr/>
-        </p:nvSpPr>
-        <p:spPr>
-          <a:xfrm>
-            <a:off x="10607040" y="4206240"/>
-            <a:ext cx="2743200" cy="2743200"/>
           </a:xfrm>
           <a:prstGeom prst="ellipse">
             <a:avLst/>
